--- a/Презентация.pptx
+++ b/Презентация.pptx
@@ -5,13 +5,12 @@
     <p:sldMasterId id="2147483708" r:id="rId1"/>
   </p:sldMasterIdLst>
   <p:sldIdLst>
-    <p:sldId id="256" r:id="rId2"/>
-    <p:sldId id="263" r:id="rId3"/>
-    <p:sldId id="258" r:id="rId4"/>
-    <p:sldId id="259" r:id="rId5"/>
-    <p:sldId id="260" r:id="rId6"/>
-    <p:sldId id="261" r:id="rId7"/>
-    <p:sldId id="262" r:id="rId8"/>
+    <p:sldId id="263" r:id="rId2"/>
+    <p:sldId id="258" r:id="rId3"/>
+    <p:sldId id="259" r:id="rId4"/>
+    <p:sldId id="260" r:id="rId5"/>
+    <p:sldId id="261" r:id="rId6"/>
+    <p:sldId id="262" r:id="rId7"/>
   </p:sldIdLst>
   <p:sldSz cx="9144000" cy="6858000" type="screen4x3"/>
   <p:notesSz cx="6858000" cy="9144000"/>
@@ -4174,7 +4173,7 @@
       </p:grpSpPr>
       <p:sp>
         <p:nvSpPr>
-          <p:cNvPr id="2" name="Заголовок 1"/>
+          <p:cNvPr id="3" name="Заголовок 2"/>
           <p:cNvSpPr>
             <a:spLocks noGrp="1"/>
           </p:cNvSpPr>
@@ -4182,18 +4181,82 @@
             <p:ph type="ctrTitle"/>
           </p:nvPr>
         </p:nvSpPr>
-        <p:spPr/>
+        <p:spPr>
+          <a:xfrm>
+            <a:off x="1403648" y="1916832"/>
+            <a:ext cx="7406640" cy="1472184"/>
+          </a:xfrm>
+        </p:spPr>
         <p:txBody>
           <a:bodyPr/>
           <a:lstStyle/>
           <a:p>
-            <a:endParaRPr lang="ru-RU"/>
-          </a:p>
-        </p:txBody>
-      </p:sp>
-      <p:sp>
-        <p:nvSpPr>
-          <p:cNvPr id="3" name="Подзаголовок 2"/>
+            <a:r>
+              <a:rPr lang="en-US" b="1" dirty="0" smtClean="0">
+                <a:solidFill>
+                  <a:schemeClr val="tx1"/>
+                </a:solidFill>
+                <a:latin typeface="Times New Roman" pitchFamily="18" charset="0"/>
+                <a:cs typeface="Times New Roman" pitchFamily="18" charset="0"/>
+              </a:rPr>
+              <a:t>Shoe Store</a:t>
+            </a:r>
+            <a:r>
+              <a:rPr lang="ru-RU" b="1" dirty="0" smtClean="0">
+                <a:solidFill>
+                  <a:schemeClr val="tx1"/>
+                </a:solidFill>
+                <a:latin typeface="Times New Roman" pitchFamily="18" charset="0"/>
+                <a:cs typeface="Times New Roman" pitchFamily="18" charset="0"/>
+              </a:rPr>
+              <a:t/>
+            </a:r>
+            <a:br>
+              <a:rPr lang="ru-RU" b="1" dirty="0" smtClean="0">
+                <a:solidFill>
+                  <a:schemeClr val="tx1"/>
+                </a:solidFill>
+                <a:latin typeface="Times New Roman" pitchFamily="18" charset="0"/>
+                <a:cs typeface="Times New Roman" pitchFamily="18" charset="0"/>
+              </a:rPr>
+            </a:br>
+            <a:r>
+              <a:rPr lang="ru-RU" b="1" dirty="0" smtClean="0">
+                <a:solidFill>
+                  <a:schemeClr val="tx1"/>
+                </a:solidFill>
+                <a:latin typeface="Times New Roman" pitchFamily="18" charset="0"/>
+                <a:cs typeface="Times New Roman" pitchFamily="18" charset="0"/>
+              </a:rPr>
+              <a:t>(</a:t>
+            </a:r>
+            <a:r>
+              <a:rPr lang="en-US" b="1" dirty="0" smtClean="0">
+                <a:solidFill>
+                  <a:schemeClr val="tx1"/>
+                </a:solidFill>
+                <a:latin typeface="Times New Roman" pitchFamily="18" charset="0"/>
+                <a:cs typeface="Times New Roman" pitchFamily="18" charset="0"/>
+              </a:rPr>
+              <a:t>Android</a:t>
+            </a:r>
+            <a:r>
+              <a:rPr lang="ru-RU" b="1" dirty="0" smtClean="0">
+                <a:solidFill>
+                  <a:schemeClr val="tx1"/>
+                </a:solidFill>
+                <a:latin typeface="Times New Roman" pitchFamily="18" charset="0"/>
+                <a:cs typeface="Times New Roman" pitchFamily="18" charset="0"/>
+              </a:rPr>
+              <a:t> приложение)</a:t>
+            </a:r>
+            <a:endParaRPr lang="ru-RU" dirty="0"/>
+          </a:p>
+        </p:txBody>
+      </p:sp>
+      <p:sp>
+        <p:nvSpPr>
+          <p:cNvPr id="2" name="Подзаголовок 1"/>
           <p:cNvSpPr>
             <a:spLocks noGrp="1"/>
           </p:cNvSpPr>
@@ -4201,160 +4264,182 @@
             <p:ph type="subTitle" idx="1"/>
           </p:nvPr>
         </p:nvSpPr>
-        <p:spPr/>
-        <p:txBody>
-          <a:bodyPr/>
-          <a:lstStyle/>
-          <a:p>
-            <a:endParaRPr lang="ru-RU"/>
-          </a:p>
-        </p:txBody>
-      </p:sp>
-      <p:pic>
-        <p:nvPicPr>
-          <p:cNvPr id="4" name="Рисунок 3" descr="06d2f0fc62e78c44f3958c72b4b7890f.jpg"/>
-          <p:cNvPicPr>
-            <a:picLocks noChangeAspect="1"/>
-          </p:cNvPicPr>
-          <p:nvPr/>
-        </p:nvPicPr>
-        <p:blipFill>
-          <a:blip r:embed="rId2" cstate="print"/>
-          <a:stretch>
-            <a:fillRect/>
-          </a:stretch>
-        </p:blipFill>
         <p:spPr>
           <a:xfrm>
-            <a:off x="0" y="0"/>
-            <a:ext cx="9144000" cy="6858000"/>
+            <a:off x="5724128" y="5877272"/>
+            <a:ext cx="4283968" cy="1181776"/>
+          </a:xfrm>
+        </p:spPr>
+        <p:txBody>
+          <a:bodyPr>
+            <a:normAutofit/>
+          </a:bodyPr>
+          <a:lstStyle/>
+          <a:p>
+            <a:r>
+              <a:rPr lang="ru-RU" sz="2000" dirty="0" smtClean="0"/>
+              <a:t>Студент группы ИС-22Б</a:t>
+            </a:r>
+          </a:p>
+          <a:p>
+            <a:r>
+              <a:rPr lang="ru-RU" sz="2000" dirty="0" smtClean="0"/>
+              <a:t>Глазов Кирилл Николаевич</a:t>
+            </a:r>
+            <a:endParaRPr lang="ru-RU" sz="2000" dirty="0"/>
+          </a:p>
+        </p:txBody>
+      </p:sp>
+      <p:sp>
+        <p:nvSpPr>
+          <p:cNvPr id="4" name="Содержимое 2"/>
+          <p:cNvSpPr txBox="1">
+            <a:spLocks/>
+          </p:cNvSpPr>
+          <p:nvPr/>
+        </p:nvSpPr>
+        <p:spPr>
+          <a:xfrm>
+            <a:off x="755576" y="188640"/>
+            <a:ext cx="8568952" cy="2075122"/>
           </a:xfrm>
           <a:prstGeom prst="rect">
             <a:avLst/>
           </a:prstGeom>
         </p:spPr>
-      </p:pic>
-      <p:sp>
-        <p:nvSpPr>
-          <p:cNvPr id="5" name="Прямоугольник 4"/>
-          <p:cNvSpPr/>
-          <p:nvPr/>
-        </p:nvSpPr>
-        <p:spPr>
-          <a:xfrm>
-            <a:off x="285720" y="2500306"/>
-            <a:ext cx="6000792" cy="1446550"/>
-          </a:xfrm>
-          <a:prstGeom prst="rect">
-            <a:avLst/>
-          </a:prstGeom>
-        </p:spPr>
-        <p:txBody>
-          <a:bodyPr wrap="square">
-            <a:spAutoFit/>
+        <p:txBody>
+          <a:bodyPr tIns="0">
+            <a:normAutofit/>
           </a:bodyPr>
           <a:lstStyle/>
           <a:p>
-            <a:r>
-              <a:rPr lang="en-US" sz="8800" b="1" dirty="0" smtClean="0">
+            <a:pPr marL="27432" marR="0" lvl="0" indent="0" algn="ctr" defTabSz="914400" rtl="0" eaLnBrk="1" fontAlgn="auto" latinLnBrk="0" hangingPunct="1">
+              <a:lnSpc>
+                <a:spcPct val="100000"/>
+              </a:lnSpc>
+              <a:spcBef>
+                <a:spcPts val="600"/>
+              </a:spcBef>
+              <a:spcAft>
+                <a:spcPts val="0"/>
+              </a:spcAft>
+              <a:buClr>
+                <a:schemeClr val="accent1"/>
+              </a:buClr>
+              <a:buSzPct val="80000"/>
+              <a:buFont typeface="Wingdings 2"/>
+              <a:buNone/>
+              <a:tabLst/>
+              <a:defRPr/>
+            </a:pPr>
+            <a:r>
+              <a:rPr kumimoji="0" lang="ru-RU" sz="2000" b="0" i="0" u="none" strike="noStrike" kern="1200" cap="none" spc="0" normalizeH="0" baseline="0" noProof="0" dirty="0" smtClean="0">
+                <a:ln>
+                  <a:noFill/>
+                </a:ln>
                 <a:solidFill>
-                  <a:schemeClr val="tx1"/>
+                  <a:schemeClr val="tx2">
+                    <a:shade val="30000"/>
+                    <a:satMod val="150000"/>
+                  </a:schemeClr>
                 </a:solidFill>
-                <a:latin typeface="Times New Roman" pitchFamily="18" charset="0"/>
-                <a:cs typeface="Times New Roman" pitchFamily="18" charset="0"/>
-              </a:rPr>
-              <a:t>Shoe Store</a:t>
-            </a:r>
-            <a:endParaRPr lang="ru-RU" sz="8800" dirty="0">
-              <a:latin typeface="Times New Roman" pitchFamily="18" charset="0"/>
-              <a:cs typeface="Times New Roman" pitchFamily="18" charset="0"/>
+                <a:effectLst/>
+                <a:uLnTx/>
+                <a:uFillTx/>
+                <a:latin typeface="+mn-lt"/>
+                <a:ea typeface="+mn-ea"/>
+                <a:cs typeface="+mn-cs"/>
+              </a:rPr>
+              <a:t>Государственное</a:t>
+            </a:r>
+            <a:r>
+              <a:rPr kumimoji="0" lang="ru-RU" sz="2000" b="0" i="0" u="none" strike="noStrike" kern="1200" cap="none" spc="0" normalizeH="0" noProof="0" dirty="0" smtClean="0">
+                <a:ln>
+                  <a:noFill/>
+                </a:ln>
+                <a:solidFill>
+                  <a:schemeClr val="tx2">
+                    <a:shade val="30000"/>
+                    <a:satMod val="150000"/>
+                  </a:schemeClr>
+                </a:solidFill>
+                <a:effectLst/>
+                <a:uLnTx/>
+                <a:uFillTx/>
+                <a:latin typeface="+mn-lt"/>
+                <a:ea typeface="+mn-ea"/>
+                <a:cs typeface="+mn-cs"/>
+              </a:rPr>
+              <a:t> бюджетное профессиональное образовательное учреждение «Заволжский </a:t>
+            </a:r>
+            <a:r>
+              <a:rPr kumimoji="0" lang="ru-RU" sz="2000" b="0" i="0" u="none" strike="noStrike" kern="1200" cap="none" spc="0" normalizeH="0" noProof="0" dirty="0" err="1" smtClean="0">
+                <a:ln>
+                  <a:noFill/>
+                </a:ln>
+                <a:solidFill>
+                  <a:schemeClr val="tx2">
+                    <a:shade val="30000"/>
+                    <a:satMod val="150000"/>
+                  </a:schemeClr>
+                </a:solidFill>
+                <a:effectLst/>
+                <a:uLnTx/>
+                <a:uFillTx/>
+                <a:latin typeface="+mn-lt"/>
+                <a:ea typeface="+mn-ea"/>
+                <a:cs typeface="+mn-cs"/>
+              </a:rPr>
+              <a:t>автом</a:t>
+            </a:r>
+            <a:r>
+              <a:rPr lang="ru-RU" sz="2000" dirty="0" smtClean="0">
+                <a:solidFill>
+                  <a:schemeClr val="tx2">
+                    <a:shade val="30000"/>
+                    <a:satMod val="150000"/>
+                  </a:schemeClr>
+                </a:solidFill>
+              </a:rPr>
+              <a:t>о</a:t>
+            </a:r>
+            <a:r>
+              <a:rPr kumimoji="0" lang="ru-RU" sz="2000" b="0" i="0" u="none" strike="noStrike" kern="1200" cap="none" spc="0" normalizeH="0" noProof="0" dirty="0" smtClean="0">
+                <a:ln>
+                  <a:noFill/>
+                </a:ln>
+                <a:solidFill>
+                  <a:schemeClr val="tx2">
+                    <a:shade val="30000"/>
+                    <a:satMod val="150000"/>
+                  </a:schemeClr>
+                </a:solidFill>
+                <a:effectLst/>
+                <a:uLnTx/>
+                <a:uFillTx/>
+                <a:latin typeface="+mn-lt"/>
+                <a:ea typeface="+mn-ea"/>
+                <a:cs typeface="+mn-cs"/>
+              </a:rPr>
+              <a:t>торный техникум»</a:t>
+            </a:r>
+            <a:endParaRPr kumimoji="0" lang="ru-RU" sz="2000" b="0" i="0" u="none" strike="noStrike" kern="1200" cap="none" spc="0" normalizeH="0" baseline="0" noProof="0" dirty="0">
+              <a:ln>
+                <a:noFill/>
+              </a:ln>
+              <a:solidFill>
+                <a:schemeClr val="tx2">
+                  <a:shade val="30000"/>
+                  <a:satMod val="150000"/>
+                </a:schemeClr>
+              </a:solidFill>
+              <a:effectLst/>
+              <a:uLnTx/>
+              <a:uFillTx/>
+              <a:latin typeface="+mn-lt"/>
+              <a:ea typeface="+mn-ea"/>
+              <a:cs typeface="+mn-cs"/>
             </a:endParaRPr>
-          </a:p>
-        </p:txBody>
-      </p:sp>
-      <p:sp>
-        <p:nvSpPr>
-          <p:cNvPr id="6" name="Прямоугольник 5"/>
-          <p:cNvSpPr/>
-          <p:nvPr/>
-        </p:nvSpPr>
-        <p:spPr>
-          <a:xfrm>
-            <a:off x="142844" y="0"/>
-            <a:ext cx="4572000" cy="1200329"/>
-          </a:xfrm>
-          <a:prstGeom prst="rect">
-            <a:avLst/>
-          </a:prstGeom>
-        </p:spPr>
-        <p:txBody>
-          <a:bodyPr>
-            <a:spAutoFit/>
-          </a:bodyPr>
-          <a:lstStyle/>
-          <a:p>
-            <a:pPr algn="ctr"/>
-            <a:r>
-              <a:rPr lang="ru-RU" dirty="0">
-                <a:latin typeface="Times New Roman" pitchFamily="18" charset="0"/>
-                <a:cs typeface="Times New Roman" pitchFamily="18" charset="0"/>
-              </a:rPr>
-              <a:t>Государственное бюджетное профессиональное образовательное учреждение «Заволжский автомоторный техникум»</a:t>
-            </a:r>
-          </a:p>
-        </p:txBody>
-      </p:sp>
-      <p:sp>
-        <p:nvSpPr>
-          <p:cNvPr id="7" name="Прямоугольник 6"/>
-          <p:cNvSpPr/>
-          <p:nvPr/>
-        </p:nvSpPr>
-        <p:spPr>
-          <a:xfrm>
-            <a:off x="428596" y="5500702"/>
-            <a:ext cx="4572000" cy="646331"/>
-          </a:xfrm>
-          <a:prstGeom prst="rect">
-            <a:avLst/>
-          </a:prstGeom>
-        </p:spPr>
-        <p:txBody>
-          <a:bodyPr>
-            <a:spAutoFit/>
-          </a:bodyPr>
-          <a:lstStyle/>
-          <a:p>
-            <a:pPr algn="ctr"/>
-            <a:r>
-              <a:rPr lang="ru-RU" b="1" dirty="0" smtClean="0"/>
-              <a:t>Выполнил</a:t>
-            </a:r>
-            <a:r>
-              <a:rPr lang="en-US" dirty="0" smtClean="0"/>
-              <a:t>: </a:t>
-            </a:r>
-            <a:r>
-              <a:rPr lang="ru-RU" dirty="0" smtClean="0"/>
-              <a:t>студент </a:t>
-            </a:r>
-            <a:r>
-              <a:rPr lang="ru-RU" dirty="0" smtClean="0"/>
-              <a:t>группы </a:t>
-            </a:r>
-            <a:r>
-              <a:rPr lang="ru-RU" dirty="0" smtClean="0"/>
-              <a:t>ИС-22Б</a:t>
-            </a:r>
-            <a:endParaRPr lang="en-US" dirty="0" smtClean="0"/>
-          </a:p>
-          <a:p>
-            <a:pPr algn="ctr"/>
-            <a:r>
-              <a:rPr lang="ru-RU" dirty="0" smtClean="0"/>
-              <a:t>Глазов Кирилл Николаевич</a:t>
-            </a:r>
-            <a:endParaRPr lang="ru-RU" dirty="0"/>
           </a:p>
         </p:txBody>
       </p:sp>
@@ -4363,13 +4448,6 @@
   <p:clrMapOvr>
     <a:masterClrMapping/>
   </p:clrMapOvr>
-  <p:timing>
-    <p:tnLst>
-      <p:par>
-        <p:cTn id="1" dur="indefinite" restart="never" nodeType="tmRoot"/>
-      </p:par>
-    </p:tnLst>
-  </p:timing>
 </p:sld>
 </file>
 
@@ -4392,333 +4470,6 @@
       </p:grpSpPr>
       <p:sp>
         <p:nvSpPr>
-          <p:cNvPr id="3" name="Заголовок 2"/>
-          <p:cNvSpPr>
-            <a:spLocks noGrp="1"/>
-          </p:cNvSpPr>
-          <p:nvPr>
-            <p:ph type="ctrTitle"/>
-          </p:nvPr>
-        </p:nvSpPr>
-        <p:spPr>
-          <a:xfrm>
-            <a:off x="1403648" y="1916832"/>
-            <a:ext cx="7406640" cy="1472184"/>
-          </a:xfrm>
-        </p:spPr>
-        <p:txBody>
-          <a:bodyPr/>
-          <a:lstStyle/>
-          <a:p>
-            <a:r>
-              <a:rPr lang="en-US" b="1" dirty="0" smtClean="0">
-                <a:solidFill>
-                  <a:schemeClr val="tx1"/>
-                </a:solidFill>
-                <a:latin typeface="Times New Roman" pitchFamily="18" charset="0"/>
-                <a:cs typeface="Times New Roman" pitchFamily="18" charset="0"/>
-              </a:rPr>
-              <a:t>Shoe </a:t>
-            </a:r>
-            <a:r>
-              <a:rPr lang="en-US" b="1" dirty="0" smtClean="0">
-                <a:solidFill>
-                  <a:schemeClr val="tx1"/>
-                </a:solidFill>
-                <a:latin typeface="Times New Roman" pitchFamily="18" charset="0"/>
-                <a:cs typeface="Times New Roman" pitchFamily="18" charset="0"/>
-              </a:rPr>
-              <a:t>Store</a:t>
-            </a:r>
-            <a:r>
-              <a:rPr lang="ru-RU" b="1" dirty="0" smtClean="0">
-                <a:solidFill>
-                  <a:schemeClr val="tx1"/>
-                </a:solidFill>
-                <a:latin typeface="Times New Roman" pitchFamily="18" charset="0"/>
-                <a:cs typeface="Times New Roman" pitchFamily="18" charset="0"/>
-              </a:rPr>
-              <a:t/>
-            </a:r>
-            <a:br>
-              <a:rPr lang="ru-RU" b="1" dirty="0" smtClean="0">
-                <a:solidFill>
-                  <a:schemeClr val="tx1"/>
-                </a:solidFill>
-                <a:latin typeface="Times New Roman" pitchFamily="18" charset="0"/>
-                <a:cs typeface="Times New Roman" pitchFamily="18" charset="0"/>
-              </a:rPr>
-            </a:br>
-            <a:r>
-              <a:rPr lang="ru-RU" b="1" dirty="0" smtClean="0">
-                <a:solidFill>
-                  <a:schemeClr val="tx1"/>
-                </a:solidFill>
-                <a:latin typeface="Times New Roman" pitchFamily="18" charset="0"/>
-                <a:cs typeface="Times New Roman" pitchFamily="18" charset="0"/>
-              </a:rPr>
-              <a:t>(</a:t>
-            </a:r>
-            <a:r>
-              <a:rPr lang="en-US" b="1" dirty="0" smtClean="0">
-                <a:solidFill>
-                  <a:schemeClr val="tx1"/>
-                </a:solidFill>
-                <a:latin typeface="Times New Roman" pitchFamily="18" charset="0"/>
-                <a:cs typeface="Times New Roman" pitchFamily="18" charset="0"/>
-              </a:rPr>
-              <a:t>An</a:t>
-            </a:r>
-            <a:r>
-              <a:rPr lang="en-US" b="1" dirty="0" smtClean="0">
-                <a:solidFill>
-                  <a:schemeClr val="tx1"/>
-                </a:solidFill>
-                <a:latin typeface="Times New Roman" pitchFamily="18" charset="0"/>
-                <a:cs typeface="Times New Roman" pitchFamily="18" charset="0"/>
-              </a:rPr>
-              <a:t>d</a:t>
-            </a:r>
-            <a:r>
-              <a:rPr lang="en-US" b="1" dirty="0" smtClean="0">
-                <a:solidFill>
-                  <a:schemeClr val="tx1"/>
-                </a:solidFill>
-                <a:latin typeface="Times New Roman" pitchFamily="18" charset="0"/>
-                <a:cs typeface="Times New Roman" pitchFamily="18" charset="0"/>
-              </a:rPr>
-              <a:t>roid</a:t>
-            </a:r>
-            <a:r>
-              <a:rPr lang="ru-RU" b="1" dirty="0" smtClean="0">
-                <a:solidFill>
-                  <a:schemeClr val="tx1"/>
-                </a:solidFill>
-                <a:latin typeface="Times New Roman" pitchFamily="18" charset="0"/>
-                <a:cs typeface="Times New Roman" pitchFamily="18" charset="0"/>
-              </a:rPr>
-              <a:t> приложение)</a:t>
-            </a:r>
-            <a:endParaRPr lang="ru-RU" dirty="0"/>
-          </a:p>
-        </p:txBody>
-      </p:sp>
-      <p:sp>
-        <p:nvSpPr>
-          <p:cNvPr id="2" name="Подзаголовок 1"/>
-          <p:cNvSpPr>
-            <a:spLocks noGrp="1"/>
-          </p:cNvSpPr>
-          <p:nvPr>
-            <p:ph type="subTitle" idx="1"/>
-          </p:nvPr>
-        </p:nvSpPr>
-        <p:spPr>
-          <a:xfrm>
-            <a:off x="5724128" y="5877272"/>
-            <a:ext cx="4283968" cy="1181776"/>
-          </a:xfrm>
-        </p:spPr>
-        <p:txBody>
-          <a:bodyPr>
-            <a:normAutofit/>
-          </a:bodyPr>
-          <a:lstStyle/>
-          <a:p>
-            <a:r>
-              <a:rPr lang="ru-RU" sz="2000" dirty="0" smtClean="0"/>
-              <a:t>Студент группы ИС-22Б</a:t>
-            </a:r>
-          </a:p>
-          <a:p>
-            <a:r>
-              <a:rPr lang="ru-RU" sz="2000" dirty="0" smtClean="0"/>
-              <a:t>Глазов Кирилл Николаевич</a:t>
-            </a:r>
-            <a:endParaRPr lang="ru-RU" sz="2000" dirty="0"/>
-          </a:p>
-        </p:txBody>
-      </p:sp>
-      <p:sp>
-        <p:nvSpPr>
-          <p:cNvPr id="4" name="Содержимое 2"/>
-          <p:cNvSpPr txBox="1">
-            <a:spLocks/>
-          </p:cNvSpPr>
-          <p:nvPr/>
-        </p:nvSpPr>
-        <p:spPr>
-          <a:xfrm>
-            <a:off x="755576" y="188640"/>
-            <a:ext cx="8568952" cy="2075122"/>
-          </a:xfrm>
-          <a:prstGeom prst="rect">
-            <a:avLst/>
-          </a:prstGeom>
-        </p:spPr>
-        <p:txBody>
-          <a:bodyPr tIns="0">
-            <a:normAutofit/>
-          </a:bodyPr>
-          <a:lstStyle/>
-          <a:p>
-            <a:pPr marL="27432" marR="0" lvl="0" indent="0" algn="ctr" defTabSz="914400" rtl="0" eaLnBrk="1" fontAlgn="auto" latinLnBrk="0" hangingPunct="1">
-              <a:lnSpc>
-                <a:spcPct val="100000"/>
-              </a:lnSpc>
-              <a:spcBef>
-                <a:spcPts val="600"/>
-              </a:spcBef>
-              <a:spcAft>
-                <a:spcPts val="0"/>
-              </a:spcAft>
-              <a:buClr>
-                <a:schemeClr val="accent1"/>
-              </a:buClr>
-              <a:buSzPct val="80000"/>
-              <a:buFont typeface="Wingdings 2"/>
-              <a:buNone/>
-              <a:tabLst/>
-              <a:defRPr/>
-            </a:pPr>
-            <a:r>
-              <a:rPr kumimoji="0" lang="ru-RU" sz="2000" b="0" i="0" u="none" strike="noStrike" kern="1200" cap="none" spc="0" normalizeH="0" baseline="0" noProof="0" dirty="0" smtClean="0">
-                <a:ln>
-                  <a:noFill/>
-                </a:ln>
-                <a:solidFill>
-                  <a:schemeClr val="tx2">
-                    <a:shade val="30000"/>
-                    <a:satMod val="150000"/>
-                  </a:schemeClr>
-                </a:solidFill>
-                <a:effectLst/>
-                <a:uLnTx/>
-                <a:uFillTx/>
-                <a:latin typeface="+mn-lt"/>
-                <a:ea typeface="+mn-ea"/>
-                <a:cs typeface="+mn-cs"/>
-              </a:rPr>
-              <a:t>Государственное</a:t>
-            </a:r>
-            <a:r>
-              <a:rPr kumimoji="0" lang="ru-RU" sz="2000" b="0" i="0" u="none" strike="noStrike" kern="1200" cap="none" spc="0" normalizeH="0" noProof="0" dirty="0" smtClean="0">
-                <a:ln>
-                  <a:noFill/>
-                </a:ln>
-                <a:solidFill>
-                  <a:schemeClr val="tx2">
-                    <a:shade val="30000"/>
-                    <a:satMod val="150000"/>
-                  </a:schemeClr>
-                </a:solidFill>
-                <a:effectLst/>
-                <a:uLnTx/>
-                <a:uFillTx/>
-                <a:latin typeface="+mn-lt"/>
-                <a:ea typeface="+mn-ea"/>
-                <a:cs typeface="+mn-cs"/>
-              </a:rPr>
-              <a:t> бюджетное профессиональное образовательное учреждение «Заволжский </a:t>
-            </a:r>
-            <a:r>
-              <a:rPr kumimoji="0" lang="ru-RU" sz="2000" b="0" i="0" u="none" strike="noStrike" kern="1200" cap="none" spc="0" normalizeH="0" noProof="0" dirty="0" err="1" smtClean="0">
-                <a:ln>
-                  <a:noFill/>
-                </a:ln>
-                <a:solidFill>
-                  <a:schemeClr val="tx2">
-                    <a:shade val="30000"/>
-                    <a:satMod val="150000"/>
-                  </a:schemeClr>
-                </a:solidFill>
-                <a:effectLst/>
-                <a:uLnTx/>
-                <a:uFillTx/>
-                <a:latin typeface="+mn-lt"/>
-                <a:ea typeface="+mn-ea"/>
-                <a:cs typeface="+mn-cs"/>
-              </a:rPr>
-              <a:t>автом</a:t>
-            </a:r>
-            <a:r>
-              <a:rPr lang="ru-RU" sz="2000" dirty="0" smtClean="0">
-                <a:solidFill>
-                  <a:schemeClr val="tx2">
-                    <a:shade val="30000"/>
-                    <a:satMod val="150000"/>
-                  </a:schemeClr>
-                </a:solidFill>
-              </a:rPr>
-              <a:t>о</a:t>
-            </a:r>
-            <a:r>
-              <a:rPr kumimoji="0" lang="ru-RU" sz="2000" b="0" i="0" u="none" strike="noStrike" kern="1200" cap="none" spc="0" normalizeH="0" noProof="0" dirty="0" smtClean="0">
-                <a:ln>
-                  <a:noFill/>
-                </a:ln>
-                <a:solidFill>
-                  <a:schemeClr val="tx2">
-                    <a:shade val="30000"/>
-                    <a:satMod val="150000"/>
-                  </a:schemeClr>
-                </a:solidFill>
-                <a:effectLst/>
-                <a:uLnTx/>
-                <a:uFillTx/>
-                <a:latin typeface="+mn-lt"/>
-                <a:ea typeface="+mn-ea"/>
-                <a:cs typeface="+mn-cs"/>
-              </a:rPr>
-              <a:t>торный техникум»</a:t>
-            </a:r>
-            <a:endParaRPr kumimoji="0" lang="ru-RU" sz="2000" b="0" i="0" u="none" strike="noStrike" kern="1200" cap="none" spc="0" normalizeH="0" baseline="0" noProof="0" dirty="0">
-              <a:ln>
-                <a:noFill/>
-              </a:ln>
-              <a:solidFill>
-                <a:schemeClr val="tx2">
-                  <a:shade val="30000"/>
-                  <a:satMod val="150000"/>
-                </a:schemeClr>
-              </a:solidFill>
-              <a:effectLst/>
-              <a:uLnTx/>
-              <a:uFillTx/>
-              <a:latin typeface="+mn-lt"/>
-              <a:ea typeface="+mn-ea"/>
-              <a:cs typeface="+mn-cs"/>
-            </a:endParaRPr>
-          </a:p>
-        </p:txBody>
-      </p:sp>
-    </p:spTree>
-  </p:cSld>
-  <p:clrMapOvr>
-    <a:masterClrMapping/>
-  </p:clrMapOvr>
-</p:sld>
-</file>
-
-<file path=ppt/slides/slide3.xml><?xml version="1.0" encoding="utf-8"?>
-<p:sld xmlns:a="http://schemas.openxmlformats.org/drawingml/2006/main" xmlns:r="http://schemas.openxmlformats.org/officeDocument/2006/relationships" xmlns:p="http://schemas.openxmlformats.org/presentationml/2006/main">
-  <p:cSld>
-    <p:spTree>
-      <p:nvGrpSpPr>
-        <p:cNvPr id="1" name=""/>
-        <p:cNvGrpSpPr/>
-        <p:nvPr/>
-      </p:nvGrpSpPr>
-      <p:grpSpPr>
-        <a:xfrm>
-          <a:off x="0" y="0"/>
-          <a:ext cx="0" cy="0"/>
-          <a:chOff x="0" y="0"/>
-          <a:chExt cx="0" cy="0"/>
-        </a:xfrm>
-      </p:grpSpPr>
-      <p:sp>
-        <p:nvSpPr>
           <p:cNvPr id="2" name="Заголовок 1"/>
           <p:cNvSpPr>
             <a:spLocks noGrp="1"/>
@@ -5037,7 +4788,7 @@
 </p:sld>
 </file>
 
-<file path=ppt/slides/slide4.xml><?xml version="1.0" encoding="utf-8"?>
+<file path=ppt/slides/slide3.xml><?xml version="1.0" encoding="utf-8"?>
 <p:sld xmlns:a="http://schemas.openxmlformats.org/drawingml/2006/main" xmlns:r="http://schemas.openxmlformats.org/officeDocument/2006/relationships" xmlns:p="http://schemas.openxmlformats.org/presentationml/2006/main">
   <p:cSld>
     <p:spTree>
@@ -5120,6 +4871,463 @@
 </p:sld>
 </file>
 
+<file path=ppt/slides/slide4.xml><?xml version="1.0" encoding="utf-8"?>
+<p:sld xmlns:a="http://schemas.openxmlformats.org/drawingml/2006/main" xmlns:r="http://schemas.openxmlformats.org/officeDocument/2006/relationships" xmlns:p="http://schemas.openxmlformats.org/presentationml/2006/main">
+  <p:cSld>
+    <p:spTree>
+      <p:nvGrpSpPr>
+        <p:cNvPr id="1" name=""/>
+        <p:cNvGrpSpPr/>
+        <p:nvPr/>
+      </p:nvGrpSpPr>
+      <p:grpSpPr>
+        <a:xfrm>
+          <a:off x="0" y="0"/>
+          <a:ext cx="0" cy="0"/>
+          <a:chOff x="0" y="0"/>
+          <a:chExt cx="0" cy="0"/>
+        </a:xfrm>
+      </p:grpSpPr>
+      <p:sp>
+        <p:nvSpPr>
+          <p:cNvPr id="2" name="Заголовок 1"/>
+          <p:cNvSpPr>
+            <a:spLocks noGrp="1"/>
+          </p:cNvSpPr>
+          <p:nvPr>
+            <p:ph type="title"/>
+          </p:nvPr>
+        </p:nvSpPr>
+        <p:spPr/>
+        <p:txBody>
+          <a:bodyPr>
+            <a:normAutofit/>
+          </a:bodyPr>
+          <a:lstStyle/>
+          <a:p>
+            <a:r>
+              <a:rPr lang="ru-RU" spc="-50" dirty="0" smtClean="0">
+                <a:latin typeface="Times New Roman" pitchFamily="18" charset="0"/>
+                <a:cs typeface="Times New Roman" pitchFamily="18" charset="0"/>
+              </a:rPr>
+              <a:t>Архитектурные решения</a:t>
+            </a:r>
+            <a:endParaRPr lang="ru-RU" dirty="0">
+              <a:latin typeface="Times New Roman" pitchFamily="18" charset="0"/>
+              <a:cs typeface="Times New Roman" pitchFamily="18" charset="0"/>
+            </a:endParaRPr>
+          </a:p>
+        </p:txBody>
+      </p:sp>
+      <p:sp>
+        <p:nvSpPr>
+          <p:cNvPr id="3" name="Содержимое 2"/>
+          <p:cNvSpPr>
+            <a:spLocks noGrp="1"/>
+          </p:cNvSpPr>
+          <p:nvPr>
+            <p:ph idx="1"/>
+          </p:nvPr>
+        </p:nvSpPr>
+        <p:spPr>
+          <a:xfrm>
+            <a:off x="971600" y="1428736"/>
+            <a:ext cx="7958118" cy="2500330"/>
+          </a:xfrm>
+        </p:spPr>
+        <p:txBody>
+          <a:bodyPr>
+            <a:normAutofit fontScale="85000" lnSpcReduction="20000"/>
+          </a:bodyPr>
+          <a:lstStyle/>
+          <a:p>
+            <a:pPr>
+              <a:buNone/>
+            </a:pPr>
+            <a:r>
+              <a:rPr lang="ru-RU" dirty="0" smtClean="0">
+                <a:latin typeface="Times New Roman" pitchFamily="18" charset="0"/>
+                <a:cs typeface="Times New Roman" pitchFamily="18" charset="0"/>
+              </a:rPr>
+              <a:t>           В качестве архитектурного решения был выбран паттерн MVVM (</a:t>
+            </a:r>
+            <a:r>
+              <a:rPr lang="ru-RU" dirty="0" err="1" smtClean="0">
+                <a:latin typeface="Times New Roman" pitchFamily="18" charset="0"/>
+                <a:cs typeface="Times New Roman" pitchFamily="18" charset="0"/>
+              </a:rPr>
+              <a:t>Model</a:t>
+            </a:r>
+            <a:r>
+              <a:rPr lang="ru-RU" dirty="0" smtClean="0">
+                <a:latin typeface="Times New Roman" pitchFamily="18" charset="0"/>
+                <a:cs typeface="Times New Roman" pitchFamily="18" charset="0"/>
+              </a:rPr>
+              <a:t>–</a:t>
+            </a:r>
+            <a:r>
+              <a:rPr lang="ru-RU" dirty="0" err="1" smtClean="0">
+                <a:latin typeface="Times New Roman" pitchFamily="18" charset="0"/>
+                <a:cs typeface="Times New Roman" pitchFamily="18" charset="0"/>
+              </a:rPr>
+              <a:t>View</a:t>
+            </a:r>
+            <a:r>
+              <a:rPr lang="ru-RU" dirty="0" smtClean="0">
+                <a:latin typeface="Times New Roman" pitchFamily="18" charset="0"/>
+                <a:cs typeface="Times New Roman" pitchFamily="18" charset="0"/>
+              </a:rPr>
+              <a:t>–</a:t>
+            </a:r>
+            <a:r>
+              <a:rPr lang="ru-RU" dirty="0" err="1" smtClean="0">
+                <a:latin typeface="Times New Roman" pitchFamily="18" charset="0"/>
+                <a:cs typeface="Times New Roman" pitchFamily="18" charset="0"/>
+              </a:rPr>
+              <a:t>ViewModel</a:t>
+            </a:r>
+            <a:r>
+              <a:rPr lang="ru-RU" dirty="0" smtClean="0">
+                <a:latin typeface="Times New Roman" pitchFamily="18" charset="0"/>
+                <a:cs typeface="Times New Roman" pitchFamily="18" charset="0"/>
+              </a:rPr>
+              <a:t>)., поскольку он обеспечивает эффективное взаимодействие с </a:t>
+            </a:r>
+            <a:r>
+              <a:rPr lang="ru-RU" dirty="0" err="1" smtClean="0">
+                <a:latin typeface="Times New Roman" pitchFamily="18" charset="0"/>
+                <a:cs typeface="Times New Roman" pitchFamily="18" charset="0"/>
+              </a:rPr>
+              <a:t>Jetpack</a:t>
+            </a:r>
+            <a:r>
+              <a:rPr lang="ru-RU" dirty="0" smtClean="0">
+                <a:latin typeface="Times New Roman" pitchFamily="18" charset="0"/>
+                <a:cs typeface="Times New Roman" pitchFamily="18" charset="0"/>
+              </a:rPr>
+              <a:t> </a:t>
+            </a:r>
+            <a:r>
+              <a:rPr lang="ru-RU" dirty="0" err="1" smtClean="0">
+                <a:latin typeface="Times New Roman" pitchFamily="18" charset="0"/>
+                <a:cs typeface="Times New Roman" pitchFamily="18" charset="0"/>
+              </a:rPr>
+              <a:t>Compose</a:t>
+            </a:r>
+            <a:r>
+              <a:rPr lang="ru-RU" dirty="0" smtClean="0">
+                <a:latin typeface="Times New Roman" pitchFamily="18" charset="0"/>
+                <a:cs typeface="Times New Roman" pitchFamily="18" charset="0"/>
+              </a:rPr>
+              <a:t> и полностью соответствует лучшим практикам, рекомендованным </a:t>
+            </a:r>
+            <a:r>
+              <a:rPr lang="ru-RU" dirty="0" err="1" smtClean="0">
+                <a:latin typeface="Times New Roman" pitchFamily="18" charset="0"/>
+                <a:cs typeface="Times New Roman" pitchFamily="18" charset="0"/>
+              </a:rPr>
+              <a:t>Android</a:t>
+            </a:r>
+            <a:r>
+              <a:rPr lang="ru-RU" dirty="0" smtClean="0">
+                <a:latin typeface="Times New Roman" pitchFamily="18" charset="0"/>
+                <a:cs typeface="Times New Roman" pitchFamily="18" charset="0"/>
+              </a:rPr>
+              <a:t> </a:t>
+            </a:r>
+            <a:r>
+              <a:rPr lang="ru-RU" dirty="0" err="1" smtClean="0">
+                <a:latin typeface="Times New Roman" pitchFamily="18" charset="0"/>
+                <a:cs typeface="Times New Roman" pitchFamily="18" charset="0"/>
+              </a:rPr>
+              <a:t>Jetpack</a:t>
+            </a:r>
+            <a:r>
+              <a:rPr lang="ru-RU" dirty="0" smtClean="0">
+                <a:latin typeface="Times New Roman" pitchFamily="18" charset="0"/>
+                <a:cs typeface="Times New Roman" pitchFamily="18" charset="0"/>
+              </a:rPr>
+              <a:t>.</a:t>
+            </a:r>
+          </a:p>
+          <a:p>
+            <a:pPr>
+              <a:buNone/>
+            </a:pPr>
+            <a:r>
+              <a:rPr lang="ru-RU" dirty="0" smtClean="0"/>
+              <a:t>             </a:t>
+            </a:r>
+          </a:p>
+          <a:p>
+            <a:pPr>
+              <a:buNone/>
+            </a:pPr>
+            <a:endParaRPr lang="ru-RU" dirty="0" smtClean="0"/>
+          </a:p>
+          <a:p>
+            <a:pPr>
+              <a:buNone/>
+            </a:pPr>
+            <a:endParaRPr lang="ru-RU" dirty="0" smtClean="0"/>
+          </a:p>
+          <a:p>
+            <a:pPr>
+              <a:buNone/>
+            </a:pPr>
+            <a:endParaRPr lang="ru-RU" dirty="0"/>
+          </a:p>
+        </p:txBody>
+      </p:sp>
+      <p:sp>
+        <p:nvSpPr>
+          <p:cNvPr id="4" name="TextBox 3"/>
+          <p:cNvSpPr txBox="1"/>
+          <p:nvPr/>
+        </p:nvSpPr>
+        <p:spPr>
+          <a:xfrm>
+            <a:off x="899592" y="3789040"/>
+            <a:ext cx="7499850" cy="2277547"/>
+          </a:xfrm>
+          <a:prstGeom prst="rect">
+            <a:avLst/>
+          </a:prstGeom>
+          <a:noFill/>
+        </p:spPr>
+        <p:txBody>
+          <a:bodyPr wrap="square" rtlCol="0">
+            <a:spAutoFit/>
+          </a:bodyPr>
+          <a:lstStyle/>
+          <a:p>
+            <a:pPr lvl="1">
+              <a:buFont typeface="Arial" pitchFamily="34" charset="0"/>
+              <a:buChar char="•"/>
+            </a:pPr>
+            <a:r>
+              <a:rPr lang="en-US" sz="3000" dirty="0" smtClean="0">
+                <a:latin typeface="Times New Roman" pitchFamily="18" charset="0"/>
+                <a:cs typeface="Times New Roman" pitchFamily="18" charset="0"/>
+              </a:rPr>
+              <a:t> </a:t>
+            </a:r>
+            <a:r>
+              <a:rPr lang="ru-RU" sz="3000" dirty="0" smtClean="0">
+                <a:latin typeface="Times New Roman" pitchFamily="18" charset="0"/>
+                <a:cs typeface="Times New Roman" pitchFamily="18" charset="0"/>
+              </a:rPr>
+              <a:t>Модели</a:t>
+            </a:r>
+            <a:r>
+              <a:rPr lang="ru-RU" sz="2800" dirty="0" smtClean="0">
+                <a:latin typeface="Times New Roman" pitchFamily="18" charset="0"/>
+                <a:cs typeface="Times New Roman" pitchFamily="18" charset="0"/>
+              </a:rPr>
+              <a:t> данных: расположены </a:t>
+            </a:r>
+            <a:r>
+              <a:rPr lang="en-US" sz="2800" dirty="0" smtClean="0">
+                <a:latin typeface="Times New Roman" pitchFamily="18" charset="0"/>
+                <a:cs typeface="Times New Roman" pitchFamily="18" charset="0"/>
+              </a:rPr>
+              <a:t>data/model</a:t>
+            </a:r>
+            <a:endParaRPr lang="ru-RU" sz="2800" dirty="0" smtClean="0">
+              <a:latin typeface="Times New Roman" pitchFamily="18" charset="0"/>
+              <a:cs typeface="Times New Roman" pitchFamily="18" charset="0"/>
+            </a:endParaRPr>
+          </a:p>
+          <a:p>
+            <a:pPr lvl="1">
+              <a:buFont typeface="Arial" pitchFamily="34" charset="0"/>
+              <a:buChar char="•"/>
+            </a:pPr>
+            <a:r>
+              <a:rPr lang="en-US" sz="2800" dirty="0" smtClean="0">
+                <a:latin typeface="Times New Roman" pitchFamily="18" charset="0"/>
+                <a:cs typeface="Times New Roman" pitchFamily="18" charset="0"/>
+              </a:rPr>
+              <a:t> </a:t>
+            </a:r>
+            <a:r>
+              <a:rPr lang="ru-RU" sz="2800" dirty="0" smtClean="0">
+                <a:latin typeface="Times New Roman" pitchFamily="18" charset="0"/>
+                <a:cs typeface="Times New Roman" pitchFamily="18" charset="0"/>
+              </a:rPr>
+              <a:t>Работа с </a:t>
+            </a:r>
+            <a:r>
+              <a:rPr lang="en-US" sz="2800" dirty="0" smtClean="0">
+                <a:latin typeface="Times New Roman" pitchFamily="18" charset="0"/>
+                <a:cs typeface="Times New Roman" pitchFamily="18" charset="0"/>
+              </a:rPr>
+              <a:t>API: </a:t>
+            </a:r>
+            <a:r>
+              <a:rPr lang="ru-RU" sz="2800" dirty="0" smtClean="0">
+                <a:latin typeface="Times New Roman" pitchFamily="18" charset="0"/>
+                <a:cs typeface="Times New Roman" pitchFamily="18" charset="0"/>
+              </a:rPr>
+              <a:t>расположены </a:t>
+            </a:r>
+            <a:r>
+              <a:rPr lang="en-US" sz="2800" dirty="0" smtClean="0">
+                <a:latin typeface="Times New Roman" pitchFamily="18" charset="0"/>
+                <a:cs typeface="Times New Roman" pitchFamily="18" charset="0"/>
+              </a:rPr>
+              <a:t>data/service</a:t>
+            </a:r>
+            <a:endParaRPr lang="ru-RU" sz="2800" dirty="0" smtClean="0">
+              <a:latin typeface="Times New Roman" pitchFamily="18" charset="0"/>
+              <a:cs typeface="Times New Roman" pitchFamily="18" charset="0"/>
+            </a:endParaRPr>
+          </a:p>
+          <a:p>
+            <a:pPr lvl="1">
+              <a:buFont typeface="Arial" pitchFamily="34" charset="0"/>
+              <a:buChar char="•"/>
+            </a:pPr>
+            <a:r>
+              <a:rPr lang="ru-RU" sz="2800" dirty="0" smtClean="0">
+                <a:latin typeface="Times New Roman" pitchFamily="18" charset="0"/>
+                <a:cs typeface="Times New Roman" pitchFamily="18" charset="0"/>
+              </a:rPr>
+              <a:t> </a:t>
+            </a:r>
+            <a:r>
+              <a:rPr lang="en-US" sz="2800" dirty="0" smtClean="0">
+                <a:latin typeface="Times New Roman" pitchFamily="18" charset="0"/>
+                <a:cs typeface="Times New Roman" pitchFamily="18" charset="0"/>
+              </a:rPr>
+              <a:t>UI-</a:t>
+            </a:r>
+            <a:r>
+              <a:rPr lang="ru-RU" sz="2800" dirty="0" smtClean="0">
+                <a:latin typeface="Times New Roman" pitchFamily="18" charset="0"/>
+                <a:cs typeface="Times New Roman" pitchFamily="18" charset="0"/>
+              </a:rPr>
+              <a:t>компоненты:  расположены </a:t>
+            </a:r>
+            <a:r>
+              <a:rPr lang="en-US" sz="2800" dirty="0" err="1" smtClean="0">
+                <a:latin typeface="Times New Roman" pitchFamily="18" charset="0"/>
+                <a:cs typeface="Times New Roman" pitchFamily="18" charset="0"/>
+              </a:rPr>
+              <a:t>ui</a:t>
+            </a:r>
+            <a:r>
+              <a:rPr lang="en-US" sz="2800" dirty="0" smtClean="0">
+                <a:latin typeface="Times New Roman" pitchFamily="18" charset="0"/>
+                <a:cs typeface="Times New Roman" pitchFamily="18" charset="0"/>
+              </a:rPr>
+              <a:t>/view</a:t>
+            </a:r>
+            <a:endParaRPr lang="ru-RU" sz="2800" dirty="0" smtClean="0">
+              <a:latin typeface="Times New Roman" pitchFamily="18" charset="0"/>
+              <a:cs typeface="Times New Roman" pitchFamily="18" charset="0"/>
+            </a:endParaRPr>
+          </a:p>
+          <a:p>
+            <a:pPr lvl="1">
+              <a:buFont typeface="Arial" pitchFamily="34" charset="0"/>
+              <a:buChar char="•"/>
+            </a:pPr>
+            <a:r>
+              <a:rPr lang="ru-RU" sz="2800" dirty="0" smtClean="0">
+                <a:latin typeface="Times New Roman" pitchFamily="18" charset="0"/>
+                <a:cs typeface="Times New Roman" pitchFamily="18" charset="0"/>
+              </a:rPr>
+              <a:t> Темы: расположены </a:t>
+            </a:r>
+            <a:r>
+              <a:rPr lang="en-US" sz="2800" dirty="0" err="1" smtClean="0">
+                <a:latin typeface="Times New Roman" pitchFamily="18" charset="0"/>
+                <a:cs typeface="Times New Roman" pitchFamily="18" charset="0"/>
+              </a:rPr>
+              <a:t>ui</a:t>
+            </a:r>
+            <a:r>
+              <a:rPr lang="en-US" sz="2800" dirty="0" smtClean="0">
+                <a:latin typeface="Times New Roman" pitchFamily="18" charset="0"/>
+                <a:cs typeface="Times New Roman" pitchFamily="18" charset="0"/>
+              </a:rPr>
+              <a:t>/theme</a:t>
+            </a:r>
+            <a:endParaRPr lang="ru-RU" sz="2800" dirty="0" smtClean="0">
+              <a:latin typeface="Times New Roman" pitchFamily="18" charset="0"/>
+              <a:cs typeface="Times New Roman" pitchFamily="18" charset="0"/>
+            </a:endParaRPr>
+          </a:p>
+          <a:p>
+            <a:pPr lvl="1">
+              <a:buFont typeface="Arial" pitchFamily="34" charset="0"/>
+              <a:buChar char="•"/>
+            </a:pPr>
+            <a:r>
+              <a:rPr lang="ru-RU" sz="2800" dirty="0" smtClean="0">
+                <a:latin typeface="Times New Roman" pitchFamily="18" charset="0"/>
+                <a:cs typeface="Times New Roman" pitchFamily="18" charset="0"/>
+              </a:rPr>
+              <a:t> </a:t>
+            </a:r>
+            <a:r>
+              <a:rPr lang="en-US" sz="2800" dirty="0" err="1" smtClean="0">
+                <a:latin typeface="Times New Roman" pitchFamily="18" charset="0"/>
+                <a:cs typeface="Times New Roman" pitchFamily="18" charset="0"/>
+              </a:rPr>
+              <a:t>ViewModel</a:t>
+            </a:r>
+            <a:r>
+              <a:rPr lang="en-US" sz="2800" dirty="0" smtClean="0">
+                <a:latin typeface="Times New Roman" pitchFamily="18" charset="0"/>
+                <a:cs typeface="Times New Roman" pitchFamily="18" charset="0"/>
+              </a:rPr>
+              <a:t>:</a:t>
+            </a:r>
+            <a:r>
+              <a:rPr lang="ru-RU" sz="2800" dirty="0" smtClean="0">
+                <a:latin typeface="Times New Roman" pitchFamily="18" charset="0"/>
+                <a:cs typeface="Times New Roman" pitchFamily="18" charset="0"/>
+              </a:rPr>
+              <a:t> расположены </a:t>
+            </a:r>
+            <a:r>
+              <a:rPr lang="en-US" sz="2800" dirty="0" err="1" smtClean="0">
+                <a:latin typeface="Times New Roman" pitchFamily="18" charset="0"/>
+                <a:cs typeface="Times New Roman" pitchFamily="18" charset="0"/>
+              </a:rPr>
+              <a:t>ui</a:t>
+            </a:r>
+            <a:r>
+              <a:rPr lang="en-US" sz="2800" dirty="0" smtClean="0">
+                <a:latin typeface="Times New Roman" pitchFamily="18" charset="0"/>
+                <a:cs typeface="Times New Roman" pitchFamily="18" charset="0"/>
+              </a:rPr>
+              <a:t>/</a:t>
+            </a:r>
+            <a:r>
+              <a:rPr lang="en-US" sz="2800" dirty="0" err="1" smtClean="0">
+                <a:latin typeface="Times New Roman" pitchFamily="18" charset="0"/>
+                <a:cs typeface="Times New Roman" pitchFamily="18" charset="0"/>
+              </a:rPr>
+              <a:t>viewModel</a:t>
+            </a:r>
+            <a:endParaRPr lang="ru-RU" sz="2800" dirty="0">
+              <a:latin typeface="Times New Roman" pitchFamily="18" charset="0"/>
+              <a:cs typeface="Times New Roman" pitchFamily="18" charset="0"/>
+            </a:endParaRPr>
+          </a:p>
+        </p:txBody>
+      </p:sp>
+    </p:spTree>
+  </p:cSld>
+  <p:clrMapOvr>
+    <a:masterClrMapping/>
+  </p:clrMapOvr>
+</p:sld>
+</file>
+
 <file path=ppt/slides/slide5.xml><?xml version="1.0" encoding="utf-8"?>
 <p:sld xmlns:a="http://schemas.openxmlformats.org/drawingml/2006/main" xmlns:r="http://schemas.openxmlformats.org/officeDocument/2006/relationships" xmlns:p="http://schemas.openxmlformats.org/presentationml/2006/main">
   <p:cSld>
@@ -5159,7 +5367,7 @@
                 <a:latin typeface="Times New Roman" pitchFamily="18" charset="0"/>
                 <a:cs typeface="Times New Roman" pitchFamily="18" charset="0"/>
               </a:rPr>
-              <a:t>Архитектурные решения</a:t>
+              <a:t>Используемые библиотеки</a:t>
             </a:r>
             <a:endParaRPr lang="ru-RU" dirty="0">
               <a:latin typeface="Times New Roman" pitchFamily="18" charset="0"/>
@@ -5180,396 +5388,148 @@
         </p:nvSpPr>
         <p:spPr>
           <a:xfrm>
-            <a:off x="971600" y="1428736"/>
-            <a:ext cx="7958118" cy="2500330"/>
+            <a:off x="1187624" y="1916832"/>
+            <a:ext cx="7632848" cy="3600400"/>
           </a:xfrm>
         </p:spPr>
         <p:txBody>
           <a:bodyPr>
-            <a:normAutofit fontScale="85000" lnSpcReduction="20000"/>
+            <a:normAutofit lnSpcReduction="10000"/>
           </a:bodyPr>
           <a:lstStyle/>
           <a:p>
-            <a:pPr>
-              <a:buNone/>
-            </a:pPr>
+            <a:r>
+              <a:rPr lang="en-US" dirty="0" smtClean="0">
+                <a:latin typeface="Times New Roman" pitchFamily="18" charset="0"/>
+                <a:cs typeface="Times New Roman" pitchFamily="18" charset="0"/>
+              </a:rPr>
+              <a:t>Retrofit 2</a:t>
+            </a:r>
+            <a:r>
+              <a:rPr lang="en-US" b="1" dirty="0" smtClean="0">
+                <a:latin typeface="Times New Roman" pitchFamily="18" charset="0"/>
+                <a:cs typeface="Times New Roman" pitchFamily="18" charset="0"/>
+              </a:rPr>
+              <a:t> </a:t>
+            </a:r>
+            <a:r>
+              <a:rPr lang="en-US" dirty="0" smtClean="0">
+                <a:latin typeface="Times New Roman" pitchFamily="18" charset="0"/>
+                <a:cs typeface="Times New Roman" pitchFamily="18" charset="0"/>
+              </a:rPr>
+              <a:t>- </a:t>
+            </a:r>
             <a:r>
               <a:rPr lang="ru-RU" dirty="0" smtClean="0">
                 <a:latin typeface="Times New Roman" pitchFamily="18" charset="0"/>
                 <a:cs typeface="Times New Roman" pitchFamily="18" charset="0"/>
               </a:rPr>
-              <a:t>           В качестве архитектурного решения был выбран паттерн MVVM (</a:t>
-            </a:r>
-            <a:r>
-              <a:rPr lang="ru-RU" dirty="0" err="1" smtClean="0">
-                <a:latin typeface="Times New Roman" pitchFamily="18" charset="0"/>
-                <a:cs typeface="Times New Roman" pitchFamily="18" charset="0"/>
-              </a:rPr>
-              <a:t>Model</a:t>
-            </a:r>
-            <a:r>
-              <a:rPr lang="ru-RU" dirty="0" smtClean="0">
-                <a:latin typeface="Times New Roman" pitchFamily="18" charset="0"/>
-                <a:cs typeface="Times New Roman" pitchFamily="18" charset="0"/>
-              </a:rPr>
-              <a:t>–</a:t>
-            </a:r>
-            <a:r>
-              <a:rPr lang="ru-RU" dirty="0" err="1" smtClean="0">
-                <a:latin typeface="Times New Roman" pitchFamily="18" charset="0"/>
-                <a:cs typeface="Times New Roman" pitchFamily="18" charset="0"/>
-              </a:rPr>
-              <a:t>View</a:t>
-            </a:r>
-            <a:r>
-              <a:rPr lang="ru-RU" dirty="0" smtClean="0">
-                <a:latin typeface="Times New Roman" pitchFamily="18" charset="0"/>
-                <a:cs typeface="Times New Roman" pitchFamily="18" charset="0"/>
-              </a:rPr>
-              <a:t>–</a:t>
-            </a:r>
-            <a:r>
-              <a:rPr lang="ru-RU" dirty="0" err="1" smtClean="0">
-                <a:latin typeface="Times New Roman" pitchFamily="18" charset="0"/>
-                <a:cs typeface="Times New Roman" pitchFamily="18" charset="0"/>
-              </a:rPr>
-              <a:t>ViewModel</a:t>
-            </a:r>
-            <a:r>
-              <a:rPr lang="ru-RU" dirty="0" smtClean="0">
-                <a:latin typeface="Times New Roman" pitchFamily="18" charset="0"/>
-                <a:cs typeface="Times New Roman" pitchFamily="18" charset="0"/>
-              </a:rPr>
-              <a:t>)., поскольку он обеспечивает эффективное взаимодействие с </a:t>
-            </a:r>
-            <a:r>
-              <a:rPr lang="ru-RU" dirty="0" err="1" smtClean="0">
-                <a:latin typeface="Times New Roman" pitchFamily="18" charset="0"/>
-                <a:cs typeface="Times New Roman" pitchFamily="18" charset="0"/>
-              </a:rPr>
-              <a:t>Jetpack</a:t>
-            </a:r>
-            <a:r>
-              <a:rPr lang="ru-RU" dirty="0" smtClean="0">
-                <a:latin typeface="Times New Roman" pitchFamily="18" charset="0"/>
-                <a:cs typeface="Times New Roman" pitchFamily="18" charset="0"/>
-              </a:rPr>
-              <a:t> </a:t>
-            </a:r>
-            <a:r>
-              <a:rPr lang="ru-RU" dirty="0" err="1" smtClean="0">
-                <a:latin typeface="Times New Roman" pitchFamily="18" charset="0"/>
-                <a:cs typeface="Times New Roman" pitchFamily="18" charset="0"/>
-              </a:rPr>
-              <a:t>Compose</a:t>
-            </a:r>
-            <a:r>
-              <a:rPr lang="ru-RU" dirty="0" smtClean="0">
-                <a:latin typeface="Times New Roman" pitchFamily="18" charset="0"/>
-                <a:cs typeface="Times New Roman" pitchFamily="18" charset="0"/>
-              </a:rPr>
-              <a:t> и полностью соответствует лучшим практикам, рекомендованным </a:t>
-            </a:r>
-            <a:r>
-              <a:rPr lang="ru-RU" dirty="0" err="1" smtClean="0">
-                <a:latin typeface="Times New Roman" pitchFamily="18" charset="0"/>
-                <a:cs typeface="Times New Roman" pitchFamily="18" charset="0"/>
-              </a:rPr>
-              <a:t>Android</a:t>
-            </a:r>
-            <a:r>
-              <a:rPr lang="ru-RU" dirty="0" smtClean="0">
-                <a:latin typeface="Times New Roman" pitchFamily="18" charset="0"/>
-                <a:cs typeface="Times New Roman" pitchFamily="18" charset="0"/>
-              </a:rPr>
-              <a:t> </a:t>
-            </a:r>
-            <a:r>
-              <a:rPr lang="ru-RU" dirty="0" err="1" smtClean="0">
-                <a:latin typeface="Times New Roman" pitchFamily="18" charset="0"/>
-                <a:cs typeface="Times New Roman" pitchFamily="18" charset="0"/>
-              </a:rPr>
-              <a:t>Jetpack</a:t>
-            </a:r>
-            <a:r>
-              <a:rPr lang="ru-RU" dirty="0" smtClean="0">
-                <a:latin typeface="Times New Roman" pitchFamily="18" charset="0"/>
-                <a:cs typeface="Times New Roman" pitchFamily="18" charset="0"/>
-              </a:rPr>
-              <a:t>.</a:t>
-            </a:r>
-          </a:p>
-          <a:p>
-            <a:pPr>
-              <a:buNone/>
-            </a:pPr>
-            <a:r>
-              <a:rPr lang="ru-RU" dirty="0" smtClean="0"/>
-              <a:t>             </a:t>
-            </a:r>
-          </a:p>
-          <a:p>
-            <a:pPr>
-              <a:buNone/>
-            </a:pPr>
-            <a:endParaRPr lang="ru-RU" dirty="0" smtClean="0"/>
-          </a:p>
-          <a:p>
-            <a:pPr>
-              <a:buNone/>
-            </a:pPr>
-            <a:endParaRPr lang="ru-RU" dirty="0" smtClean="0"/>
-          </a:p>
-          <a:p>
-            <a:pPr>
-              <a:buNone/>
-            </a:pPr>
-            <a:endParaRPr lang="ru-RU" dirty="0"/>
-          </a:p>
-        </p:txBody>
-      </p:sp>
-      <p:sp>
-        <p:nvSpPr>
-          <p:cNvPr id="4" name="TextBox 3"/>
-          <p:cNvSpPr txBox="1"/>
-          <p:nvPr/>
-        </p:nvSpPr>
-        <p:spPr>
-          <a:xfrm>
-            <a:off x="899592" y="3789040"/>
-            <a:ext cx="7499850" cy="2277547"/>
-          </a:xfrm>
-          <a:prstGeom prst="rect">
-            <a:avLst/>
-          </a:prstGeom>
-          <a:noFill/>
-        </p:spPr>
-        <p:txBody>
-          <a:bodyPr wrap="square" rtlCol="0">
-            <a:spAutoFit/>
-          </a:bodyPr>
-          <a:lstStyle/>
-          <a:p>
-            <a:pPr lvl="1">
-              <a:buFont typeface="Arial" pitchFamily="34" charset="0"/>
-              <a:buChar char="•"/>
-            </a:pPr>
-            <a:r>
-              <a:rPr lang="en-US" sz="3000" dirty="0" smtClean="0">
-                <a:latin typeface="Times New Roman" pitchFamily="18" charset="0"/>
-                <a:cs typeface="Times New Roman" pitchFamily="18" charset="0"/>
-              </a:rPr>
-              <a:t> </a:t>
-            </a:r>
-            <a:r>
-              <a:rPr lang="ru-RU" sz="3000" dirty="0" smtClean="0">
-                <a:latin typeface="Times New Roman" pitchFamily="18" charset="0"/>
-                <a:cs typeface="Times New Roman" pitchFamily="18" charset="0"/>
-              </a:rPr>
-              <a:t>Модели</a:t>
-            </a:r>
-            <a:r>
-              <a:rPr lang="ru-RU" sz="2800" dirty="0" smtClean="0">
-                <a:latin typeface="Times New Roman" pitchFamily="18" charset="0"/>
-                <a:cs typeface="Times New Roman" pitchFamily="18" charset="0"/>
-              </a:rPr>
-              <a:t> данных: расположены </a:t>
-            </a:r>
-            <a:r>
-              <a:rPr lang="en-US" sz="2800" dirty="0" smtClean="0">
-                <a:latin typeface="Times New Roman" pitchFamily="18" charset="0"/>
-                <a:cs typeface="Times New Roman" pitchFamily="18" charset="0"/>
-              </a:rPr>
-              <a:t>data/model</a:t>
-            </a:r>
-            <a:endParaRPr lang="ru-RU" sz="2800" dirty="0" smtClean="0">
+              <a:t>Библиотека для работы с REST API.</a:t>
+            </a:r>
+            <a:endParaRPr lang="en-US" dirty="0" smtClean="0">
               <a:latin typeface="Times New Roman" pitchFamily="18" charset="0"/>
               <a:cs typeface="Times New Roman" pitchFamily="18" charset="0"/>
             </a:endParaRPr>
           </a:p>
           <a:p>
-            <a:pPr lvl="1">
-              <a:buFont typeface="Arial" pitchFamily="34" charset="0"/>
-              <a:buChar char="•"/>
-            </a:pPr>
-            <a:r>
-              <a:rPr lang="en-US" sz="2800" dirty="0" smtClean="0">
+            <a:r>
+              <a:rPr lang="en-US" dirty="0" smtClean="0">
+                <a:latin typeface="Times New Roman" pitchFamily="18" charset="0"/>
+                <a:cs typeface="Times New Roman" pitchFamily="18" charset="0"/>
+              </a:rPr>
+              <a:t>Material 3</a:t>
+            </a:r>
+            <a:r>
+              <a:rPr lang="en-US" b="1" dirty="0" smtClean="0">
                 <a:latin typeface="Times New Roman" pitchFamily="18" charset="0"/>
                 <a:cs typeface="Times New Roman" pitchFamily="18" charset="0"/>
               </a:rPr>
               <a:t> </a:t>
             </a:r>
             <a:r>
-              <a:rPr lang="ru-RU" sz="2800" dirty="0" smtClean="0">
-                <a:latin typeface="Times New Roman" pitchFamily="18" charset="0"/>
-                <a:cs typeface="Times New Roman" pitchFamily="18" charset="0"/>
-              </a:rPr>
-              <a:t>Работа с </a:t>
-            </a:r>
-            <a:r>
-              <a:rPr lang="en-US" sz="2800" dirty="0" smtClean="0">
-                <a:latin typeface="Times New Roman" pitchFamily="18" charset="0"/>
-                <a:cs typeface="Times New Roman" pitchFamily="18" charset="0"/>
-              </a:rPr>
-              <a:t>API: </a:t>
-            </a:r>
-            <a:r>
-              <a:rPr lang="ru-RU" sz="2800" dirty="0" smtClean="0">
-                <a:latin typeface="Times New Roman" pitchFamily="18" charset="0"/>
-                <a:cs typeface="Times New Roman" pitchFamily="18" charset="0"/>
-              </a:rPr>
-              <a:t>расположены </a:t>
-            </a:r>
-            <a:r>
-              <a:rPr lang="en-US" sz="2800" dirty="0" smtClean="0">
-                <a:latin typeface="Times New Roman" pitchFamily="18" charset="0"/>
-                <a:cs typeface="Times New Roman" pitchFamily="18" charset="0"/>
-              </a:rPr>
-              <a:t>data/service</a:t>
-            </a:r>
-            <a:endParaRPr lang="ru-RU" sz="2800" dirty="0" smtClean="0">
+              <a:rPr lang="en-US" dirty="0" smtClean="0">
+                <a:latin typeface="Times New Roman" pitchFamily="18" charset="0"/>
+                <a:cs typeface="Times New Roman" pitchFamily="18" charset="0"/>
+              </a:rPr>
+              <a:t>- </a:t>
+            </a:r>
+            <a:r>
+              <a:rPr lang="ru-RU" dirty="0" smtClean="0">
+                <a:latin typeface="Times New Roman" pitchFamily="18" charset="0"/>
+                <a:cs typeface="Times New Roman" pitchFamily="18" charset="0"/>
+              </a:rPr>
+              <a:t>Готовая дизайн-система от </a:t>
+            </a:r>
+            <a:r>
+              <a:rPr lang="ru-RU" dirty="0" err="1" smtClean="0">
+                <a:latin typeface="Times New Roman" pitchFamily="18" charset="0"/>
+                <a:cs typeface="Times New Roman" pitchFamily="18" charset="0"/>
+              </a:rPr>
+              <a:t>Google</a:t>
+            </a:r>
+            <a:r>
+              <a:rPr lang="ru-RU" dirty="0" smtClean="0">
+                <a:latin typeface="Times New Roman" pitchFamily="18" charset="0"/>
+                <a:cs typeface="Times New Roman" pitchFamily="18" charset="0"/>
+              </a:rPr>
+              <a:t> для современных приложений</a:t>
+            </a:r>
+            <a:endParaRPr lang="en-US" dirty="0" smtClean="0">
               <a:latin typeface="Times New Roman" pitchFamily="18" charset="0"/>
               <a:cs typeface="Times New Roman" pitchFamily="18" charset="0"/>
             </a:endParaRPr>
           </a:p>
           <a:p>
-            <a:pPr lvl="1">
-              <a:buFont typeface="Arial" pitchFamily="34" charset="0"/>
-              <a:buChar char="•"/>
-            </a:pPr>
-            <a:r>
-              <a:rPr lang="ru-RU" sz="2800" dirty="0" smtClean="0">
+            <a:r>
+              <a:rPr lang="en-US" dirty="0" smtClean="0">
+                <a:latin typeface="Times New Roman" pitchFamily="18" charset="0"/>
+                <a:cs typeface="Times New Roman" pitchFamily="18" charset="0"/>
+              </a:rPr>
+              <a:t>Navigation Compose - </a:t>
+            </a:r>
+            <a:r>
+              <a:rPr lang="ru-RU" dirty="0" smtClean="0">
+                <a:latin typeface="Times New Roman" pitchFamily="18" charset="0"/>
+                <a:cs typeface="Times New Roman" pitchFamily="18" charset="0"/>
+              </a:rPr>
+              <a:t>Компонент для</a:t>
+            </a:r>
+            <a:r>
+              <a:rPr lang="en-US" dirty="0" smtClean="0">
                 <a:latin typeface="Times New Roman" pitchFamily="18" charset="0"/>
                 <a:cs typeface="Times New Roman" pitchFamily="18" charset="0"/>
               </a:rPr>
               <a:t> </a:t>
             </a:r>
             <a:r>
-              <a:rPr lang="en-US" sz="2800" dirty="0" smtClean="0">
-                <a:latin typeface="Times New Roman" pitchFamily="18" charset="0"/>
-                <a:cs typeface="Times New Roman" pitchFamily="18" charset="0"/>
-              </a:rPr>
-              <a:t>UI-</a:t>
-            </a:r>
-            <a:r>
-              <a:rPr lang="ru-RU" sz="2800" dirty="0" smtClean="0">
-                <a:latin typeface="Times New Roman" pitchFamily="18" charset="0"/>
-                <a:cs typeface="Times New Roman" pitchFamily="18" charset="0"/>
-              </a:rPr>
-              <a:t>компоненты:  расположены </a:t>
-            </a:r>
-            <a:r>
-              <a:rPr lang="en-US" sz="2800" dirty="0" err="1" smtClean="0">
-                <a:latin typeface="Times New Roman" pitchFamily="18" charset="0"/>
-                <a:cs typeface="Times New Roman" pitchFamily="18" charset="0"/>
-              </a:rPr>
-              <a:t>ui</a:t>
-            </a:r>
-            <a:r>
-              <a:rPr lang="en-US" sz="2800" dirty="0" smtClean="0">
-                <a:latin typeface="Times New Roman" pitchFamily="18" charset="0"/>
-                <a:cs typeface="Times New Roman" pitchFamily="18" charset="0"/>
-              </a:rPr>
-              <a:t>/</a:t>
-            </a:r>
-            <a:r>
-              <a:rPr lang="en-US" sz="2800" dirty="0" smtClean="0">
-                <a:latin typeface="Times New Roman" pitchFamily="18" charset="0"/>
-                <a:cs typeface="Times New Roman" pitchFamily="18" charset="0"/>
-              </a:rPr>
-              <a:t>view</a:t>
-            </a:r>
-            <a:endParaRPr lang="ru-RU" sz="2800" dirty="0" smtClean="0">
-              <a:latin typeface="Times New Roman" pitchFamily="18" charset="0"/>
-              <a:cs typeface="Times New Roman" pitchFamily="18" charset="0"/>
-            </a:endParaRPr>
-          </a:p>
-          <a:p>
-            <a:pPr lvl="1">
-              <a:buFont typeface="Arial" pitchFamily="34" charset="0"/>
-              <a:buChar char="•"/>
-            </a:pPr>
-            <a:r>
-              <a:rPr lang="ru-RU" sz="2800" dirty="0" smtClean="0">
-                <a:latin typeface="Times New Roman" pitchFamily="18" charset="0"/>
-                <a:cs typeface="Times New Roman" pitchFamily="18" charset="0"/>
-              </a:rPr>
-              <a:t> Темы: расположены </a:t>
-            </a:r>
-            <a:r>
-              <a:rPr lang="en-US" sz="2800" dirty="0" err="1" smtClean="0">
-                <a:latin typeface="Times New Roman" pitchFamily="18" charset="0"/>
-                <a:cs typeface="Times New Roman" pitchFamily="18" charset="0"/>
-              </a:rPr>
-              <a:t>ui</a:t>
-            </a:r>
-            <a:r>
-              <a:rPr lang="en-US" sz="2800" dirty="0" smtClean="0">
-                <a:latin typeface="Times New Roman" pitchFamily="18" charset="0"/>
-                <a:cs typeface="Times New Roman" pitchFamily="18" charset="0"/>
-              </a:rPr>
-              <a:t>/theme</a:t>
-            </a:r>
-            <a:endParaRPr lang="ru-RU" sz="2800" dirty="0" smtClean="0">
-              <a:latin typeface="Times New Roman" pitchFamily="18" charset="0"/>
-              <a:cs typeface="Times New Roman" pitchFamily="18" charset="0"/>
-            </a:endParaRPr>
-          </a:p>
-          <a:p>
-            <a:pPr lvl="1">
-              <a:buFont typeface="Arial" pitchFamily="34" charset="0"/>
-              <a:buChar char="•"/>
-            </a:pPr>
-            <a:r>
-              <a:rPr lang="ru-RU" sz="2800" dirty="0" smtClean="0">
+              <a:rPr lang="ru-RU" dirty="0" smtClean="0">
+                <a:latin typeface="Times New Roman" pitchFamily="18" charset="0"/>
+                <a:cs typeface="Times New Roman" pitchFamily="18" charset="0"/>
+              </a:rPr>
+              <a:t>навигации между экранами в </a:t>
+            </a:r>
+            <a:r>
+              <a:rPr lang="ru-RU" dirty="0" err="1" smtClean="0">
+                <a:latin typeface="Times New Roman" pitchFamily="18" charset="0"/>
+                <a:cs typeface="Times New Roman" pitchFamily="18" charset="0"/>
+              </a:rPr>
+              <a:t>Jetpack</a:t>
+            </a:r>
+            <a:r>
+              <a:rPr lang="en-US" dirty="0" smtClean="0">
                 <a:latin typeface="Times New Roman" pitchFamily="18" charset="0"/>
                 <a:cs typeface="Times New Roman" pitchFamily="18" charset="0"/>
               </a:rPr>
               <a:t> </a:t>
             </a:r>
             <a:r>
-              <a:rPr lang="en-US" sz="2800" dirty="0" err="1" smtClean="0">
-                <a:latin typeface="Times New Roman" pitchFamily="18" charset="0"/>
-                <a:cs typeface="Times New Roman" pitchFamily="18" charset="0"/>
-              </a:rPr>
-              <a:t>ViewModel</a:t>
-            </a:r>
-            <a:r>
-              <a:rPr lang="en-US" sz="2800" dirty="0" smtClean="0">
-                <a:latin typeface="Times New Roman" pitchFamily="18" charset="0"/>
-                <a:cs typeface="Times New Roman" pitchFamily="18" charset="0"/>
-              </a:rPr>
-              <a:t>:</a:t>
-            </a:r>
-            <a:r>
-              <a:rPr lang="ru-RU" sz="2800" dirty="0" smtClean="0">
-                <a:latin typeface="Times New Roman" pitchFamily="18" charset="0"/>
-                <a:cs typeface="Times New Roman" pitchFamily="18" charset="0"/>
-              </a:rPr>
-              <a:t> расположены </a:t>
-            </a:r>
-            <a:r>
-              <a:rPr lang="en-US" sz="2800" dirty="0" err="1" smtClean="0">
-                <a:latin typeface="Times New Roman" pitchFamily="18" charset="0"/>
-                <a:cs typeface="Times New Roman" pitchFamily="18" charset="0"/>
-              </a:rPr>
-              <a:t>ui</a:t>
-            </a:r>
-            <a:r>
-              <a:rPr lang="en-US" sz="2800" dirty="0" smtClean="0">
-                <a:latin typeface="Times New Roman" pitchFamily="18" charset="0"/>
-                <a:cs typeface="Times New Roman" pitchFamily="18" charset="0"/>
-              </a:rPr>
-              <a:t>/</a:t>
-            </a:r>
-            <a:r>
-              <a:rPr lang="en-US" sz="2800" dirty="0" err="1" smtClean="0">
-                <a:latin typeface="Times New Roman" pitchFamily="18" charset="0"/>
-                <a:cs typeface="Times New Roman" pitchFamily="18" charset="0"/>
-              </a:rPr>
-              <a:t>viewModel</a:t>
-            </a:r>
-            <a:endParaRPr lang="ru-RU" sz="2800" dirty="0">
+              <a:rPr lang="ru-RU" dirty="0" err="1" smtClean="0">
+                <a:latin typeface="Times New Roman" pitchFamily="18" charset="0"/>
+                <a:cs typeface="Times New Roman" pitchFamily="18" charset="0"/>
+              </a:rPr>
+              <a:t>Compose</a:t>
+            </a:r>
+            <a:endParaRPr lang="ru-RU" dirty="0">
               <a:latin typeface="Times New Roman" pitchFamily="18" charset="0"/>
               <a:cs typeface="Times New Roman" pitchFamily="18" charset="0"/>
             </a:endParaRPr>
@@ -5585,236 +5545,6 @@
 </file>
 
 <file path=ppt/slides/slide6.xml><?xml version="1.0" encoding="utf-8"?>
-<p:sld xmlns:a="http://schemas.openxmlformats.org/drawingml/2006/main" xmlns:r="http://schemas.openxmlformats.org/officeDocument/2006/relationships" xmlns:p="http://schemas.openxmlformats.org/presentationml/2006/main">
-  <p:cSld>
-    <p:spTree>
-      <p:nvGrpSpPr>
-        <p:cNvPr id="1" name=""/>
-        <p:cNvGrpSpPr/>
-        <p:nvPr/>
-      </p:nvGrpSpPr>
-      <p:grpSpPr>
-        <a:xfrm>
-          <a:off x="0" y="0"/>
-          <a:ext cx="0" cy="0"/>
-          <a:chOff x="0" y="0"/>
-          <a:chExt cx="0" cy="0"/>
-        </a:xfrm>
-      </p:grpSpPr>
-      <p:sp>
-        <p:nvSpPr>
-          <p:cNvPr id="2" name="Заголовок 1"/>
-          <p:cNvSpPr>
-            <a:spLocks noGrp="1"/>
-          </p:cNvSpPr>
-          <p:nvPr>
-            <p:ph type="title"/>
-          </p:nvPr>
-        </p:nvSpPr>
-        <p:spPr/>
-        <p:txBody>
-          <a:bodyPr>
-            <a:normAutofit/>
-          </a:bodyPr>
-          <a:lstStyle/>
-          <a:p>
-            <a:r>
-              <a:rPr lang="ru-RU" spc="-50" dirty="0" smtClean="0">
-                <a:latin typeface="Times New Roman" pitchFamily="18" charset="0"/>
-                <a:cs typeface="Times New Roman" pitchFamily="18" charset="0"/>
-              </a:rPr>
-              <a:t>Используемые библиотеки</a:t>
-            </a:r>
-            <a:endParaRPr lang="ru-RU" dirty="0">
-              <a:latin typeface="Times New Roman" pitchFamily="18" charset="0"/>
-              <a:cs typeface="Times New Roman" pitchFamily="18" charset="0"/>
-            </a:endParaRPr>
-          </a:p>
-        </p:txBody>
-      </p:sp>
-      <p:sp>
-        <p:nvSpPr>
-          <p:cNvPr id="3" name="Содержимое 2"/>
-          <p:cNvSpPr>
-            <a:spLocks noGrp="1"/>
-          </p:cNvSpPr>
-          <p:nvPr>
-            <p:ph idx="1"/>
-          </p:nvPr>
-        </p:nvSpPr>
-        <p:spPr>
-          <a:xfrm>
-            <a:off x="1187624" y="1916832"/>
-            <a:ext cx="7632848" cy="3600400"/>
-          </a:xfrm>
-        </p:spPr>
-        <p:txBody>
-          <a:bodyPr>
-            <a:normAutofit lnSpcReduction="10000"/>
-          </a:bodyPr>
-          <a:lstStyle/>
-          <a:p>
-            <a:r>
-              <a:rPr lang="en-US" dirty="0" smtClean="0">
-                <a:latin typeface="Times New Roman" pitchFamily="18" charset="0"/>
-                <a:cs typeface="Times New Roman" pitchFamily="18" charset="0"/>
-              </a:rPr>
-              <a:t>Retrofit 2</a:t>
-            </a:r>
-            <a:r>
-              <a:rPr lang="en-US" b="1" dirty="0" smtClean="0">
-                <a:latin typeface="Times New Roman" pitchFamily="18" charset="0"/>
-                <a:cs typeface="Times New Roman" pitchFamily="18" charset="0"/>
-              </a:rPr>
-              <a:t> </a:t>
-            </a:r>
-            <a:r>
-              <a:rPr lang="en-US" dirty="0" smtClean="0">
-                <a:latin typeface="Times New Roman" pitchFamily="18" charset="0"/>
-                <a:cs typeface="Times New Roman" pitchFamily="18" charset="0"/>
-              </a:rPr>
-              <a:t>- </a:t>
-            </a:r>
-            <a:r>
-              <a:rPr lang="ru-RU" dirty="0" smtClean="0">
-                <a:latin typeface="Times New Roman" pitchFamily="18" charset="0"/>
-                <a:cs typeface="Times New Roman" pitchFamily="18" charset="0"/>
-              </a:rPr>
-              <a:t>Библиотека для работы с REST API</a:t>
-            </a:r>
-            <a:r>
-              <a:rPr lang="ru-RU" dirty="0" smtClean="0">
-                <a:latin typeface="Times New Roman" pitchFamily="18" charset="0"/>
-                <a:cs typeface="Times New Roman" pitchFamily="18" charset="0"/>
-              </a:rPr>
-              <a:t>.</a:t>
-            </a:r>
-            <a:endParaRPr lang="en-US" dirty="0" smtClean="0">
-              <a:latin typeface="Times New Roman" pitchFamily="18" charset="0"/>
-              <a:cs typeface="Times New Roman" pitchFamily="18" charset="0"/>
-            </a:endParaRPr>
-          </a:p>
-          <a:p>
-            <a:r>
-              <a:rPr lang="en-US" dirty="0" smtClean="0">
-                <a:latin typeface="Times New Roman" pitchFamily="18" charset="0"/>
-                <a:cs typeface="Times New Roman" pitchFamily="18" charset="0"/>
-              </a:rPr>
-              <a:t>Material 3</a:t>
-            </a:r>
-            <a:r>
-              <a:rPr lang="en-US" b="1" dirty="0" smtClean="0">
-                <a:latin typeface="Times New Roman" pitchFamily="18" charset="0"/>
-                <a:cs typeface="Times New Roman" pitchFamily="18" charset="0"/>
-              </a:rPr>
-              <a:t> </a:t>
-            </a:r>
-            <a:r>
-              <a:rPr lang="en-US" dirty="0" smtClean="0">
-                <a:latin typeface="Times New Roman" pitchFamily="18" charset="0"/>
-                <a:cs typeface="Times New Roman" pitchFamily="18" charset="0"/>
-              </a:rPr>
-              <a:t>- </a:t>
-            </a:r>
-            <a:r>
-              <a:rPr lang="ru-RU" dirty="0" smtClean="0">
-                <a:latin typeface="Times New Roman" pitchFamily="18" charset="0"/>
-                <a:cs typeface="Times New Roman" pitchFamily="18" charset="0"/>
-              </a:rPr>
-              <a:t>Готовая дизайн-система от </a:t>
-            </a:r>
-            <a:r>
-              <a:rPr lang="ru-RU" dirty="0" err="1" smtClean="0">
-                <a:latin typeface="Times New Roman" pitchFamily="18" charset="0"/>
-                <a:cs typeface="Times New Roman" pitchFamily="18" charset="0"/>
-              </a:rPr>
-              <a:t>Google</a:t>
-            </a:r>
-            <a:r>
-              <a:rPr lang="ru-RU" dirty="0" smtClean="0">
-                <a:latin typeface="Times New Roman" pitchFamily="18" charset="0"/>
-                <a:cs typeface="Times New Roman" pitchFamily="18" charset="0"/>
-              </a:rPr>
-              <a:t> для современных </a:t>
-            </a:r>
-            <a:r>
-              <a:rPr lang="ru-RU" dirty="0" smtClean="0">
-                <a:latin typeface="Times New Roman" pitchFamily="18" charset="0"/>
-                <a:cs typeface="Times New Roman" pitchFamily="18" charset="0"/>
-              </a:rPr>
-              <a:t>приложений</a:t>
-            </a:r>
-            <a:endParaRPr lang="en-US" dirty="0" smtClean="0">
-              <a:latin typeface="Times New Roman" pitchFamily="18" charset="0"/>
-              <a:cs typeface="Times New Roman" pitchFamily="18" charset="0"/>
-            </a:endParaRPr>
-          </a:p>
-          <a:p>
-            <a:r>
-              <a:rPr lang="en-US" dirty="0" smtClean="0">
-                <a:latin typeface="Times New Roman" pitchFamily="18" charset="0"/>
-                <a:cs typeface="Times New Roman" pitchFamily="18" charset="0"/>
-              </a:rPr>
-              <a:t>Navigation Compose - </a:t>
-            </a:r>
-            <a:r>
-              <a:rPr lang="ru-RU" dirty="0" smtClean="0">
-                <a:latin typeface="Times New Roman" pitchFamily="18" charset="0"/>
-                <a:cs typeface="Times New Roman" pitchFamily="18" charset="0"/>
-              </a:rPr>
-              <a:t>Компонент для</a:t>
-            </a:r>
-            <a:r>
-              <a:rPr lang="en-US" dirty="0" smtClean="0">
-                <a:latin typeface="Times New Roman" pitchFamily="18" charset="0"/>
-                <a:cs typeface="Times New Roman" pitchFamily="18" charset="0"/>
-              </a:rPr>
-              <a:t> </a:t>
-            </a:r>
-            <a:r>
-              <a:rPr lang="ru-RU" dirty="0" smtClean="0">
-                <a:latin typeface="Times New Roman" pitchFamily="18" charset="0"/>
-                <a:cs typeface="Times New Roman" pitchFamily="18" charset="0"/>
-              </a:rPr>
-              <a:t>навигации между экранами в </a:t>
-            </a:r>
-            <a:r>
-              <a:rPr lang="ru-RU" dirty="0" err="1" smtClean="0">
-                <a:latin typeface="Times New Roman" pitchFamily="18" charset="0"/>
-                <a:cs typeface="Times New Roman" pitchFamily="18" charset="0"/>
-              </a:rPr>
-              <a:t>Jetpack</a:t>
-            </a:r>
-            <a:r>
-              <a:rPr lang="en-US" dirty="0" smtClean="0">
-                <a:latin typeface="Times New Roman" pitchFamily="18" charset="0"/>
-                <a:cs typeface="Times New Roman" pitchFamily="18" charset="0"/>
-              </a:rPr>
-              <a:t> </a:t>
-            </a:r>
-            <a:r>
-              <a:rPr lang="ru-RU" dirty="0" err="1" smtClean="0">
-                <a:latin typeface="Times New Roman" pitchFamily="18" charset="0"/>
-                <a:cs typeface="Times New Roman" pitchFamily="18" charset="0"/>
-              </a:rPr>
-              <a:t>Compose</a:t>
-            </a:r>
-            <a:endParaRPr lang="ru-RU" dirty="0">
-              <a:latin typeface="Times New Roman" pitchFamily="18" charset="0"/>
-              <a:cs typeface="Times New Roman" pitchFamily="18" charset="0"/>
-            </a:endParaRPr>
-          </a:p>
-        </p:txBody>
-      </p:sp>
-    </p:spTree>
-  </p:cSld>
-  <p:clrMapOvr>
-    <a:masterClrMapping/>
-  </p:clrMapOvr>
-</p:sld>
-</file>
-
-<file path=ppt/slides/slide7.xml><?xml version="1.0" encoding="utf-8"?>
 <p:sld xmlns:a="http://schemas.openxmlformats.org/drawingml/2006/main" xmlns:r="http://schemas.openxmlformats.org/officeDocument/2006/relationships" xmlns:p="http://schemas.openxmlformats.org/presentationml/2006/main">
   <p:cSld>
     <p:spTree>
